--- a/presentacion/supresion-dnrt.pptx
+++ b/presentacion/supresion-dnrt.pptx
@@ -2854,7 +2854,7 @@
                 <a:ea typeface="Calibri" pitchFamily="34" charset="-122"/>
                 <a:cs typeface="Calibri" pitchFamily="34" charset="-120"/>
               </a:rPr>
-              <a:t>Dirección Nacional de Reglamentos Técnicos · Subsecretaría de Comercio Exterior · Secretaría de Industria y Comercio · Ministerio de Economía</a:t>
+              <a:t>Dirección Nacional de Reglamentos Técnicos · Subsecretaría de Comercio Exterior · Secretaría de Industria, Comercio y de la Pequeña y Mediana Empresa · Ministerio de Economía</a:t>
             </a:r>
             <a:endParaRPr lang="en-US" sz="1050" dirty="0"/>
           </a:p>
@@ -3746,7 +3746,7 @@
                 <a:ea typeface="Calibri" pitchFamily="34" charset="-122"/>
                 <a:cs typeface="Calibri" pitchFamily="34" charset="-120"/>
               </a:rPr>
-              <a:t>Cada familia con riesgo real va al organismo que ya tiene la competencia sustantiva y los inspectores: ANMAT, SRT, Energía, ANSV, INTI, ENARGAS, códigos locales. Con partida, dotación y métricas en el mismo acto.</a:t>
+              <a:t>Cada familia con riesgo real va al organismo que ya tiene la competencia sustantiva y los inspectores: Salud/SENASA, SRT, Energía, Transporte/ANSV, la autoridad ambiental, el ENRGE, los códigos locales. Con partida, dotación y métricas en el mismo acto.</a:t>
             </a:r>
             <a:endParaRPr lang="en-US" sz="1150" dirty="0"/>
           </a:p>
@@ -4060,7 +4060,7 @@
           </p:nvPr>
         </p:nvGraphicFramePr>
         <p:xfrm>
-          <a:off x="548640" y="1645920"/>
+          <a:off x="548640" y="1572768"/>
           <a:ext cx="11091672" cy="914400"/>
         </p:xfrm>
         <a:graphic>
@@ -4068,11 +4068,11 @@
             <a:tbl>
               <a:tblPr/>
               <a:tblGrid>
-                <a:gridCol w="2377440"/>
-                <a:gridCol w="2011680"/>
+                <a:gridCol w="2286000"/>
+                <a:gridCol w="2103120"/>
                 <a:gridCol w="6702552"/>
               </a:tblGrid>
-              <a:tr h="566928">
+              <a:tr h="512064">
                 <a:tc>
                   <a:txBody>
                     <a:bodyPr/>
@@ -4082,7 +4082,7 @@
                         <a:buNone/>
                       </a:pPr>
                       <a:r>
-                        <a:rPr lang="en-US" sz="1050" b="1" dirty="0">
+                        <a:rPr lang="en-US" sz="950" b="1" dirty="0">
                           <a:solidFill>
                             <a:srgbClr val="FFFFFF"/>
                           </a:solidFill>
@@ -4092,14 +4092,14 @@
                         </a:rPr>
                         <a:t>Familia</a:t>
                       </a:r>
-                      <a:endParaRPr lang="en-US" sz="1050" dirty="0">
+                      <a:endParaRPr lang="en-US" sz="950" dirty="0">
                         <a:latin typeface="Calibri" charset="0"/>
                         <a:ea typeface="Calibri" charset="0"/>
                         <a:cs typeface="Calibri" charset="0"/>
                       </a:endParaRPr>
                     </a:p>
                   </a:txBody>
-                  <a:tcPr marL="54864" marR="54864" marT="54864" marB="54864" anchor="ctr">
+                  <a:tcPr marL="45720" marR="45720" marT="45720" marB="45720" anchor="ctr">
                     <a:lnL w="9525" cap="flat" cmpd="sng" algn="ctr">
                       <a:solidFill>
                         <a:srgbClr val="D5DEE9"/>
@@ -4150,7 +4150,7 @@
                         <a:buNone/>
                       </a:pPr>
                       <a:r>
-                        <a:rPr lang="en-US" sz="1050" b="1" dirty="0">
+                        <a:rPr lang="en-US" sz="950" b="1" dirty="0">
                           <a:solidFill>
                             <a:srgbClr val="FFFFFF"/>
                           </a:solidFill>
@@ -4160,14 +4160,14 @@
                         </a:rPr>
                         <a:t>Receptor</a:t>
                       </a:r>
-                      <a:endParaRPr lang="en-US" sz="1050" dirty="0">
+                      <a:endParaRPr lang="en-US" sz="950" dirty="0">
                         <a:latin typeface="Calibri" charset="0"/>
                         <a:ea typeface="Calibri" charset="0"/>
                         <a:cs typeface="Calibri" charset="0"/>
                       </a:endParaRPr>
                     </a:p>
                   </a:txBody>
-                  <a:tcPr marL="54864" marR="54864" marT="54864" marB="54864" anchor="ctr">
+                  <a:tcPr marL="45720" marR="45720" marT="45720" marB="45720" anchor="ctr">
                     <a:lnL w="9525" cap="flat" cmpd="sng" algn="ctr">
                       <a:solidFill>
                         <a:srgbClr val="D5DEE9"/>
@@ -4218,7 +4218,7 @@
                         <a:buNone/>
                       </a:pPr>
                       <a:r>
-                        <a:rPr lang="en-US" sz="1050" b="1" dirty="0">
+                        <a:rPr lang="en-US" sz="950" b="1" dirty="0">
                           <a:solidFill>
                             <a:srgbClr val="FFFFFF"/>
                           </a:solidFill>
@@ -4228,14 +4228,14 @@
                         </a:rPr>
                         <a:t>La competencia ya existe (base vigente)</a:t>
                       </a:r>
-                      <a:endParaRPr lang="en-US" sz="1050" dirty="0">
+                      <a:endParaRPr lang="en-US" sz="950" dirty="0">
                         <a:latin typeface="Calibri" charset="0"/>
                         <a:ea typeface="Calibri" charset="0"/>
                         <a:cs typeface="Calibri" charset="0"/>
                       </a:endParaRPr>
                     </a:p>
                   </a:txBody>
-                  <a:tcPr marL="54864" marR="54864" marT="54864" marB="54864" anchor="ctr">
+                  <a:tcPr marL="45720" marR="45720" marT="45720" marB="45720" anchor="ctr">
                     <a:lnL w="9525" cap="flat" cmpd="sng" algn="ctr">
                       <a:solidFill>
                         <a:srgbClr val="D5DEE9"/>
@@ -4278,7 +4278,7 @@
                   </a:tcPr>
                 </a:tc>
               </a:tr>
-              <a:tr h="566928">
+              <a:tr h="512064">
                 <a:tc>
                   <a:txBody>
                     <a:bodyPr/>
@@ -4288,7 +4288,7 @@
                         <a:buNone/>
                       </a:pPr>
                       <a:r>
-                        <a:rPr lang="en-US" sz="1050" b="1" dirty="0">
+                        <a:rPr lang="en-US" sz="950" b="1" dirty="0">
                           <a:solidFill>
                             <a:srgbClr val="22314A"/>
                           </a:solidFill>
@@ -4298,14 +4298,14 @@
                         </a:rPr>
                         <a:t>Envases en contacto con alimentos</a:t>
                       </a:r>
-                      <a:endParaRPr lang="en-US" sz="1050" dirty="0">
+                      <a:endParaRPr lang="en-US" sz="950" dirty="0">
                         <a:latin typeface="Calibri" charset="0"/>
                         <a:ea typeface="Calibri" charset="0"/>
                         <a:cs typeface="Calibri" charset="0"/>
                       </a:endParaRPr>
                     </a:p>
                   </a:txBody>
-                  <a:tcPr marL="54864" marR="54864" marT="54864" marB="54864" anchor="ctr">
+                  <a:tcPr marL="45720" marR="45720" marT="45720" marB="45720" anchor="ctr">
                     <a:lnL w="9525" cap="flat" cmpd="sng" algn="ctr">
                       <a:solidFill>
                         <a:srgbClr val="D5DEE9"/>
@@ -4356,7 +4356,7 @@
                         <a:buNone/>
                       </a:pPr>
                       <a:r>
-                        <a:rPr lang="en-US" sz="1050" b="1" dirty="0">
+                        <a:rPr lang="en-US" sz="950" b="1" dirty="0">
                           <a:solidFill>
                             <a:srgbClr val="2A7F6F"/>
                           </a:solidFill>
@@ -4364,16 +4364,16 @@
                           <a:ea typeface="Calibri" pitchFamily="34" charset="-122"/>
                           <a:cs typeface="Calibri" pitchFamily="34" charset="-120"/>
                         </a:rPr>
-                        <a:t>ANMAT / INAL (Salud)</a:t>
+                        <a:t>Gestión Sanitaria (Salud) + SENASA</a:t>
                       </a:r>
-                      <a:endParaRPr lang="en-US" sz="1050" dirty="0">
+                      <a:endParaRPr lang="en-US" sz="950" dirty="0">
                         <a:latin typeface="Calibri" charset="0"/>
                         <a:ea typeface="Calibri" charset="0"/>
                         <a:cs typeface="Calibri" charset="0"/>
                       </a:endParaRPr>
                     </a:p>
                   </a:txBody>
-                  <a:tcPr marL="54864" marR="54864" marT="54864" marB="54864" anchor="ctr">
+                  <a:tcPr marL="45720" marR="45720" marT="45720" marB="45720" anchor="ctr">
                     <a:lnL w="9525" cap="flat" cmpd="sng" algn="ctr">
                       <a:solidFill>
                         <a:srgbClr val="D5DEE9"/>
@@ -4424,7 +4424,7 @@
                         <a:buNone/>
                       </a:pPr>
                       <a:r>
-                        <a:rPr lang="en-US" sz="1050" dirty="0">
+                        <a:rPr lang="en-US" sz="950" dirty="0">
                           <a:solidFill>
                             <a:srgbClr val="22314A"/>
                           </a:solidFill>
@@ -4432,16 +4432,16 @@
                           <a:ea typeface="Calibri" pitchFamily="34" charset="-122"/>
                           <a:cs typeface="Calibri" pitchFamily="34" charset="-120"/>
                         </a:rPr>
-                        <a:t>CAA Cap. IV y art. 186 bis; Dec. 815/99. Ya consumado de facto: las GMC 2026 se internalizaron por ANMAT + Agricultura, y la familia ya no figura en el listado de la SIC.</a:t>
+                        <a:t>CAA Cap. IV (arts. 186 bis/tris; GMC internalizadas por RC 6, 9 y 11/2026). Dec. 697/2026: el SENASA ya controla, incluida la determinación de materiales de envases. Consumado de facto.</a:t>
                       </a:r>
-                      <a:endParaRPr lang="en-US" sz="1050" dirty="0">
+                      <a:endParaRPr lang="en-US" sz="950" dirty="0">
                         <a:latin typeface="Calibri" charset="0"/>
                         <a:ea typeface="Calibri" charset="0"/>
                         <a:cs typeface="Calibri" charset="0"/>
                       </a:endParaRPr>
                     </a:p>
                   </a:txBody>
-                  <a:tcPr marL="54864" marR="54864" marT="54864" marB="54864" anchor="ctr">
+                  <a:tcPr marL="45720" marR="45720" marT="45720" marB="45720" anchor="ctr">
                     <a:lnL w="9525" cap="flat" cmpd="sng" algn="ctr">
                       <a:solidFill>
                         <a:srgbClr val="D5DEE9"/>
@@ -4484,7 +4484,7 @@
                   </a:tcPr>
                 </a:tc>
               </a:tr>
-              <a:tr h="566928">
+              <a:tr h="512064">
                 <a:tc>
                   <a:txBody>
                     <a:bodyPr/>
@@ -4494,7 +4494,7 @@
                         <a:buNone/>
                       </a:pPr>
                       <a:r>
-                        <a:rPr lang="en-US" sz="1050" b="1" dirty="0">
+                        <a:rPr lang="en-US" sz="950" b="1" dirty="0">
                           <a:solidFill>
                             <a:srgbClr val="22314A"/>
                           </a:solidFill>
@@ -4504,14 +4504,14 @@
                         </a:rPr>
                         <a:t>GNC</a:t>
                       </a:r>
-                      <a:endParaRPr lang="en-US" sz="1050" dirty="0">
+                      <a:endParaRPr lang="en-US" sz="950" dirty="0">
                         <a:latin typeface="Calibri" charset="0"/>
                         <a:ea typeface="Calibri" charset="0"/>
                         <a:cs typeface="Calibri" charset="0"/>
                       </a:endParaRPr>
                     </a:p>
                   </a:txBody>
-                  <a:tcPr marL="54864" marR="54864" marT="54864" marB="54864" anchor="ctr">
+                  <a:tcPr marL="45720" marR="45720" marT="45720" marB="45720" anchor="ctr">
                     <a:lnL w="9525" cap="flat" cmpd="sng" algn="ctr">
                       <a:solidFill>
                         <a:srgbClr val="D5DEE9"/>
@@ -4562,7 +4562,7 @@
                         <a:buNone/>
                       </a:pPr>
                       <a:r>
-                        <a:rPr lang="en-US" sz="1050" b="1" dirty="0">
+                        <a:rPr lang="en-US" sz="950" b="1" dirty="0">
                           <a:solidFill>
                             <a:srgbClr val="2A7F6F"/>
                           </a:solidFill>
@@ -4570,16 +4570,16 @@
                           <a:ea typeface="Calibri" pitchFamily="34" charset="-122"/>
                           <a:cs typeface="Calibri" pitchFamily="34" charset="-120"/>
                         </a:rPr>
-                        <a:t>ENARGAS</a:t>
+                        <a:t>ENRGE (ex ENARGAS)</a:t>
                       </a:r>
-                      <a:endParaRPr lang="en-US" sz="1050" dirty="0">
+                      <a:endParaRPr lang="en-US" sz="950" dirty="0">
                         <a:latin typeface="Calibri" charset="0"/>
                         <a:ea typeface="Calibri" charset="0"/>
                         <a:cs typeface="Calibri" charset="0"/>
                       </a:endParaRPr>
                     </a:p>
                   </a:txBody>
-                  <a:tcPr marL="54864" marR="54864" marT="54864" marB="54864" anchor="ctr">
+                  <a:tcPr marL="45720" marR="45720" marT="45720" marB="45720" anchor="ctr">
                     <a:lnL w="9525" cap="flat" cmpd="sng" algn="ctr">
                       <a:solidFill>
                         <a:srgbClr val="D5DEE9"/>
@@ -4630,7 +4630,7 @@
                         <a:buNone/>
                       </a:pPr>
                       <a:r>
-                        <a:rPr lang="en-US" sz="1050" dirty="0">
+                        <a:rPr lang="en-US" sz="950" dirty="0">
                           <a:solidFill>
                             <a:srgbClr val="22314A"/>
                           </a:solidFill>
@@ -4638,16 +4638,16 @@
                           <a:ea typeface="Calibri" pitchFamily="34" charset="-122"/>
                           <a:cs typeface="Calibri" pitchFamily="34" charset="-120"/>
                         </a:rPr>
-                        <a:t>Ley 24.076 (art. 52): reglamenta, registra y fiscaliza de punta a punta. La prueba de que el modelo sectorial funciona.</a:t>
+                        <a:t>Facultades de la Ley 24.076 (art. 52), hoy en el ENRGE (Dec. 452/2025 y 318/2026): reglamenta, registra y fiscaliza de punta a punta. La prueba de que el modelo sectorial funciona.</a:t>
                       </a:r>
-                      <a:endParaRPr lang="en-US" sz="1050" dirty="0">
+                      <a:endParaRPr lang="en-US" sz="950" dirty="0">
                         <a:latin typeface="Calibri" charset="0"/>
                         <a:ea typeface="Calibri" charset="0"/>
                         <a:cs typeface="Calibri" charset="0"/>
                       </a:endParaRPr>
                     </a:p>
                   </a:txBody>
-                  <a:tcPr marL="54864" marR="54864" marT="54864" marB="54864" anchor="ctr">
+                  <a:tcPr marL="45720" marR="45720" marT="45720" marB="45720" anchor="ctr">
                     <a:lnL w="9525" cap="flat" cmpd="sng" algn="ctr">
                       <a:solidFill>
                         <a:srgbClr val="D5DEE9"/>
@@ -4690,7 +4690,7 @@
                   </a:tcPr>
                 </a:tc>
               </a:tr>
-              <a:tr h="566928">
+              <a:tr h="512064">
                 <a:tc>
                   <a:txBody>
                     <a:bodyPr/>
@@ -4700,7 +4700,7 @@
                         <a:buNone/>
                       </a:pPr>
                       <a:r>
-                        <a:rPr lang="en-US" sz="1050" b="1" dirty="0">
+                        <a:rPr lang="en-US" sz="950" b="1" dirty="0">
                           <a:solidFill>
                             <a:srgbClr val="22314A"/>
                           </a:solidFill>
@@ -4708,16 +4708,16 @@
                           <a:ea typeface="Calibri" pitchFamily="34" charset="-122"/>
                           <a:cs typeface="Calibri" pitchFamily="34" charset="-120"/>
                         </a:rPr>
-                        <a:t>Cascos, autopartes, vehículos</a:t>
+                        <a:t>Cascos, 52 autopartes (Anexo C) y LCM</a:t>
                       </a:r>
-                      <a:endParaRPr lang="en-US" sz="1050" dirty="0">
+                      <a:endParaRPr lang="en-US" sz="950" dirty="0">
                         <a:latin typeface="Calibri" charset="0"/>
                         <a:ea typeface="Calibri" charset="0"/>
                         <a:cs typeface="Calibri" charset="0"/>
                       </a:endParaRPr>
                     </a:p>
                   </a:txBody>
-                  <a:tcPr marL="54864" marR="54864" marT="54864" marB="54864" anchor="ctr">
+                  <a:tcPr marL="45720" marR="45720" marT="45720" marB="45720" anchor="ctr">
                     <a:lnL w="9525" cap="flat" cmpd="sng" algn="ctr">
                       <a:solidFill>
                         <a:srgbClr val="D5DEE9"/>
@@ -4768,7 +4768,7 @@
                         <a:buNone/>
                       </a:pPr>
                       <a:r>
-                        <a:rPr lang="en-US" sz="1050" b="1" dirty="0">
+                        <a:rPr lang="en-US" sz="950" b="1" dirty="0">
                           <a:solidFill>
                             <a:srgbClr val="2A7F6F"/>
                           </a:solidFill>
@@ -4776,16 +4776,16 @@
                           <a:ea typeface="Calibri" pitchFamily="34" charset="-122"/>
                           <a:cs typeface="Calibri" pitchFamily="34" charset="-120"/>
                         </a:rPr>
-                        <a:t>ANSV / Transporte</a:t>
+                        <a:t>Secretaría de Transporte / ANSV</a:t>
                       </a:r>
-                      <a:endParaRPr lang="en-US" sz="1050" dirty="0">
+                      <a:endParaRPr lang="en-US" sz="950" dirty="0">
                         <a:latin typeface="Calibri" charset="0"/>
                         <a:ea typeface="Calibri" charset="0"/>
                         <a:cs typeface="Calibri" charset="0"/>
                       </a:endParaRPr>
                     </a:p>
                   </a:txBody>
-                  <a:tcPr marL="54864" marR="54864" marT="54864" marB="54864" anchor="ctr">
+                  <a:tcPr marL="45720" marR="45720" marT="45720" marB="45720" anchor="ctr">
                     <a:lnL w="9525" cap="flat" cmpd="sng" algn="ctr">
                       <a:solidFill>
                         <a:srgbClr val="D5DEE9"/>
@@ -4836,7 +4836,7 @@
                         <a:buNone/>
                       </a:pPr>
                       <a:r>
-                        <a:rPr lang="en-US" sz="1050" dirty="0">
+                        <a:rPr lang="en-US" sz="950" dirty="0">
                           <a:solidFill>
                             <a:srgbClr val="22314A"/>
                           </a:solidFill>
@@ -4844,16 +4844,16 @@
                           <a:ea typeface="Calibri" pitchFamily="34" charset="-122"/>
                           <a:cs typeface="Calibri" pitchFamily="34" charset="-120"/>
                         </a:rPr>
-                        <a:t>Ley 24.449 y Dec. 779/95; el Dec. 196/2025 eliminó el CHAS citando el estudio accidentológico de la propia ANSV; la LCM ya se tramita ante el INTI.</a:t>
+                        <a:t>Ley 24.449 y Dec. 779/95; el Dec. 196/2025 eliminó el CHAS citando el estudio de la ANSV. La Res. 18/2026 concentró LCM y fiscalización en Política Industrial (con el INTI): ese bloque se reasigna completo.</a:t>
                       </a:r>
-                      <a:endParaRPr lang="en-US" sz="1050" dirty="0">
+                      <a:endParaRPr lang="en-US" sz="950" dirty="0">
                         <a:latin typeface="Calibri" charset="0"/>
                         <a:ea typeface="Calibri" charset="0"/>
                         <a:cs typeface="Calibri" charset="0"/>
                       </a:endParaRPr>
                     </a:p>
                   </a:txBody>
-                  <a:tcPr marL="54864" marR="54864" marT="54864" marB="54864" anchor="ctr">
+                  <a:tcPr marL="45720" marR="45720" marT="45720" marB="45720" anchor="ctr">
                     <a:lnL w="9525" cap="flat" cmpd="sng" algn="ctr">
                       <a:solidFill>
                         <a:srgbClr val="D5DEE9"/>
@@ -4896,7 +4896,7 @@
                   </a:tcPr>
                 </a:tc>
               </a:tr>
-              <a:tr h="566928">
+              <a:tr h="512064">
                 <a:tc>
                   <a:txBody>
                     <a:bodyPr/>
@@ -4906,7 +4906,7 @@
                         <a:buNone/>
                       </a:pPr>
                       <a:r>
-                        <a:rPr lang="en-US" sz="1050" b="1" dirty="0">
+                        <a:rPr lang="en-US" sz="950" b="1" dirty="0">
                           <a:solidFill>
                             <a:srgbClr val="22314A"/>
                           </a:solidFill>
@@ -4916,14 +4916,14 @@
                         </a:rPr>
                         <a:t>Elementos de protección personal</a:t>
                       </a:r>
-                      <a:endParaRPr lang="en-US" sz="1050" dirty="0">
+                      <a:endParaRPr lang="en-US" sz="950" dirty="0">
                         <a:latin typeface="Calibri" charset="0"/>
                         <a:ea typeface="Calibri" charset="0"/>
                         <a:cs typeface="Calibri" charset="0"/>
                       </a:endParaRPr>
                     </a:p>
                   </a:txBody>
-                  <a:tcPr marL="54864" marR="54864" marT="54864" marB="54864" anchor="ctr">
+                  <a:tcPr marL="45720" marR="45720" marT="45720" marB="45720" anchor="ctr">
                     <a:lnL w="9525" cap="flat" cmpd="sng" algn="ctr">
                       <a:solidFill>
                         <a:srgbClr val="D5DEE9"/>
@@ -4974,7 +4974,7 @@
                         <a:buNone/>
                       </a:pPr>
                       <a:r>
-                        <a:rPr lang="en-US" sz="1050" b="1" dirty="0">
+                        <a:rPr lang="en-US" sz="950" b="1" dirty="0">
                           <a:solidFill>
                             <a:srgbClr val="2A7F6F"/>
                           </a:solidFill>
@@ -4984,14 +4984,14 @@
                         </a:rPr>
                         <a:t>SRT (Trabajo)</a:t>
                       </a:r>
-                      <a:endParaRPr lang="en-US" sz="1050" dirty="0">
+                      <a:endParaRPr lang="en-US" sz="950" dirty="0">
                         <a:latin typeface="Calibri" charset="0"/>
                         <a:ea typeface="Calibri" charset="0"/>
                         <a:cs typeface="Calibri" charset="0"/>
                       </a:endParaRPr>
                     </a:p>
                   </a:txBody>
-                  <a:tcPr marL="54864" marR="54864" marT="54864" marB="54864" anchor="ctr">
+                  <a:tcPr marL="45720" marR="45720" marT="45720" marB="45720" anchor="ctr">
                     <a:lnL w="9525" cap="flat" cmpd="sng" algn="ctr">
                       <a:solidFill>
                         <a:srgbClr val="D5DEE9"/>
@@ -5042,7 +5042,7 @@
                         <a:buNone/>
                       </a:pPr>
                       <a:r>
-                        <a:rPr lang="en-US" sz="1050" dirty="0">
+                        <a:rPr lang="en-US" sz="950" dirty="0">
                           <a:solidFill>
                             <a:srgbClr val="22314A"/>
                           </a:solidFill>
@@ -5050,16 +5050,16 @@
                           <a:ea typeface="Calibri" pitchFamily="34" charset="-122"/>
                           <a:cs typeface="Calibri" pitchFamily="34" charset="-120"/>
                         </a:rPr>
-                        <a:t>Leyes 19.587 y 24.557; Res. SRT 299/2011. Hoy hay doble ventanilla: el producto en Comercio, el uso en SRT/ART.</a:t>
+                        <a:t>Leyes 19.587 y 24.557; Res. SRT 299/2011; el art. 188 del Dec. 351/79 ya exige registro de fabricantes ante Trabajo. Doble ventanilla documentada.</a:t>
                       </a:r>
-                      <a:endParaRPr lang="en-US" sz="1050" dirty="0">
+                      <a:endParaRPr lang="en-US" sz="950" dirty="0">
                         <a:latin typeface="Calibri" charset="0"/>
                         <a:ea typeface="Calibri" charset="0"/>
                         <a:cs typeface="Calibri" charset="0"/>
                       </a:endParaRPr>
                     </a:p>
                   </a:txBody>
-                  <a:tcPr marL="54864" marR="54864" marT="54864" marB="54864" anchor="ctr">
+                  <a:tcPr marL="45720" marR="45720" marT="45720" marB="45720" anchor="ctr">
                     <a:lnL w="9525" cap="flat" cmpd="sng" algn="ctr">
                       <a:solidFill>
                         <a:srgbClr val="D5DEE9"/>
@@ -5102,7 +5102,7 @@
                   </a:tcPr>
                 </a:tc>
               </a:tr>
-              <a:tr h="566928">
+              <a:tr h="512064">
                 <a:tc>
                   <a:txBody>
                     <a:bodyPr/>
@@ -5112,7 +5112,7 @@
                         <a:buNone/>
                       </a:pPr>
                       <a:r>
-                        <a:rPr lang="en-US" sz="1050" b="1" dirty="0">
+                        <a:rPr lang="en-US" sz="950" b="1" dirty="0">
                           <a:solidFill>
                             <a:srgbClr val="22314A"/>
                           </a:solidFill>
@@ -5122,14 +5122,14 @@
                         </a:rPr>
                         <a:t>Etiquetado de eficiencia energética</a:t>
                       </a:r>
-                      <a:endParaRPr lang="en-US" sz="1050" dirty="0">
+                      <a:endParaRPr lang="en-US" sz="950" dirty="0">
                         <a:latin typeface="Calibri" charset="0"/>
                         <a:ea typeface="Calibri" charset="0"/>
                         <a:cs typeface="Calibri" charset="0"/>
                       </a:endParaRPr>
                     </a:p>
                   </a:txBody>
-                  <a:tcPr marL="54864" marR="54864" marT="54864" marB="54864" anchor="ctr">
+                  <a:tcPr marL="45720" marR="45720" marT="45720" marB="45720" anchor="ctr">
                     <a:lnL w="9525" cap="flat" cmpd="sng" algn="ctr">
                       <a:solidFill>
                         <a:srgbClr val="D5DEE9"/>
@@ -5180,7 +5180,7 @@
                         <a:buNone/>
                       </a:pPr>
                       <a:r>
-                        <a:rPr lang="en-US" sz="1050" b="1" dirty="0">
+                        <a:rPr lang="en-US" sz="950" b="1" dirty="0">
                           <a:solidFill>
                             <a:srgbClr val="2A7F6F"/>
                           </a:solidFill>
@@ -5190,14 +5190,14 @@
                         </a:rPr>
                         <a:t>Secretaría de Energía</a:t>
                       </a:r>
-                      <a:endParaRPr lang="en-US" sz="1050" dirty="0">
+                      <a:endParaRPr lang="en-US" sz="950" dirty="0">
                         <a:latin typeface="Calibri" charset="0"/>
                         <a:ea typeface="Calibri" charset="0"/>
                         <a:cs typeface="Calibri" charset="0"/>
                       </a:endParaRPr>
                     </a:p>
                   </a:txBody>
-                  <a:tcPr marL="54864" marR="54864" marT="54864" marB="54864" anchor="ctr">
+                  <a:tcPr marL="45720" marR="45720" marT="45720" marB="45720" anchor="ctr">
                     <a:lnL w="9525" cap="flat" cmpd="sng" algn="ctr">
                       <a:solidFill>
                         <a:srgbClr val="D5DEE9"/>
@@ -5248,7 +5248,7 @@
                         <a:buNone/>
                       </a:pPr>
                       <a:r>
-                        <a:rPr lang="en-US" sz="1050" dirty="0">
+                        <a:rPr lang="en-US" sz="950" dirty="0">
                           <a:solidFill>
                             <a:srgbClr val="22314A"/>
                           </a:solidFill>
@@ -5256,16 +5256,16 @@
                           <a:ea typeface="Calibri" pitchFamily="34" charset="-122"/>
                           <a:cs typeface="Calibri" pitchFamily="34" charset="-120"/>
                         </a:rPr>
-                        <a:t>Dec. 274/2019 (art. 22): Energía ya fija los estándares mínimos; la etiqueta la administra Comercio. Doble regulación explícita del mismo atributo.</a:t>
+                        <a:t>Dec. 274/2019 (art. 22): los estándares se fijan con intervención previa de Energía (Res. SE 426/2025, cuyo cronograma depende de la DNRT). Salvedad: exige tocar el art. 22 (rango legislativo).</a:t>
                       </a:r>
-                      <a:endParaRPr lang="en-US" sz="1050" dirty="0">
+                      <a:endParaRPr lang="en-US" sz="950" dirty="0">
                         <a:latin typeface="Calibri" charset="0"/>
                         <a:ea typeface="Calibri" charset="0"/>
                         <a:cs typeface="Calibri" charset="0"/>
                       </a:endParaRPr>
                     </a:p>
                   </a:txBody>
-                  <a:tcPr marL="54864" marR="54864" marT="54864" marB="54864" anchor="ctr">
+                  <a:tcPr marL="45720" marR="45720" marT="45720" marB="45720" anchor="ctr">
                     <a:lnL w="9525" cap="flat" cmpd="sng" algn="ctr">
                       <a:solidFill>
                         <a:srgbClr val="D5DEE9"/>
@@ -5308,7 +5308,7 @@
                   </a:tcPr>
                 </a:tc>
               </a:tr>
-              <a:tr h="566928">
+              <a:tr h="512064">
                 <a:tc>
                   <a:txBody>
                     <a:bodyPr/>
@@ -5318,7 +5318,7 @@
                         <a:buNone/>
                       </a:pPr>
                       <a:r>
-                        <a:rPr lang="en-US" sz="1050" b="1" dirty="0">
+                        <a:rPr lang="en-US" sz="950" b="1" dirty="0">
                           <a:solidFill>
                             <a:srgbClr val="22314A"/>
                           </a:solidFill>
@@ -5328,14 +5328,14 @@
                         </a:rPr>
                         <a:t>Metrología legal (SIMELA)</a:t>
                       </a:r>
-                      <a:endParaRPr lang="en-US" sz="1050" dirty="0">
+                      <a:endParaRPr lang="en-US" sz="950" dirty="0">
                         <a:latin typeface="Calibri" charset="0"/>
                         <a:ea typeface="Calibri" charset="0"/>
                         <a:cs typeface="Calibri" charset="0"/>
                       </a:endParaRPr>
                     </a:p>
                   </a:txBody>
-                  <a:tcPr marL="54864" marR="54864" marT="54864" marB="54864" anchor="ctr">
+                  <a:tcPr marL="45720" marR="45720" marT="45720" marB="45720" anchor="ctr">
                     <a:lnL w="9525" cap="flat" cmpd="sng" algn="ctr">
                       <a:solidFill>
                         <a:srgbClr val="D5DEE9"/>
@@ -5386,7 +5386,7 @@
                         <a:buNone/>
                       </a:pPr>
                       <a:r>
-                        <a:rPr lang="en-US" sz="1050" b="1" dirty="0">
+                        <a:rPr lang="en-US" sz="950" b="1" dirty="0">
                           <a:solidFill>
                             <a:srgbClr val="2A7F6F"/>
                           </a:solidFill>
@@ -5394,16 +5394,16 @@
                           <a:ea typeface="Calibri" pitchFamily="34" charset="-122"/>
                           <a:cs typeface="Calibri" pitchFamily="34" charset="-120"/>
                         </a:rPr>
-                        <a:t>INTI</a:t>
+                        <a:t>Defensa del Consumidor y Lealtad Comercial (propia)</a:t>
                       </a:r>
-                      <a:endParaRPr lang="en-US" sz="1050" dirty="0">
+                      <a:endParaRPr lang="en-US" sz="950" dirty="0">
                         <a:latin typeface="Calibri" charset="0"/>
                         <a:ea typeface="Calibri" charset="0"/>
                         <a:cs typeface="Calibri" charset="0"/>
                       </a:endParaRPr>
                     </a:p>
                   </a:txBody>
-                  <a:tcPr marL="54864" marR="54864" marT="54864" marB="54864" anchor="ctr">
+                  <a:tcPr marL="45720" marR="45720" marT="45720" marB="45720" anchor="ctr">
                     <a:lnL w="9525" cap="flat" cmpd="sng" algn="ctr">
                       <a:solidFill>
                         <a:srgbClr val="D5DEE9"/>
@@ -5454,7 +5454,7 @@
                         <a:buNone/>
                       </a:pPr>
                       <a:r>
-                        <a:rPr lang="en-US" sz="1050" dirty="0">
+                        <a:rPr lang="en-US" sz="950" dirty="0">
                           <a:solidFill>
                             <a:srgbClr val="22314A"/>
                           </a:solidFill>
@@ -5462,16 +5462,16 @@
                           <a:ea typeface="Calibri" pitchFamily="34" charset="-122"/>
                           <a:cs typeface="Calibri" pitchFamily="34" charset="-120"/>
                         </a:rPr>
-                        <a:t>Ley 19.511: el INTI ya ejecuta aprobación de modelo, verificaciones y auditorías. El caso más maduro.</a:t>
+                        <a:t>La ejecución ya se privatizó (Res. INTI 213/2025: laboratorios acreditados OAA); la Subsecretaría ya reconoce laboratorios (Disp. 640 y 669/2026). Autoridad designable por decreto (Dec. 788/2003 y 960/2017).</a:t>
                       </a:r>
-                      <a:endParaRPr lang="en-US" sz="1050" dirty="0">
+                      <a:endParaRPr lang="en-US" sz="950" dirty="0">
                         <a:latin typeface="Calibri" charset="0"/>
                         <a:ea typeface="Calibri" charset="0"/>
                         <a:cs typeface="Calibri" charset="0"/>
                       </a:endParaRPr>
                     </a:p>
                   </a:txBody>
-                  <a:tcPr marL="54864" marR="54864" marT="54864" marB="54864" anchor="ctr">
+                  <a:tcPr marL="45720" marR="45720" marT="45720" marB="45720" anchor="ctr">
                     <a:lnL w="9525" cap="flat" cmpd="sng" algn="ctr">
                       <a:solidFill>
                         <a:srgbClr val="D5DEE9"/>
@@ -5514,7 +5514,7 @@
                   </a:tcPr>
                 </a:tc>
               </a:tr>
-              <a:tr h="566928">
+              <a:tr h="512064">
                 <a:tc>
                   <a:txBody>
                     <a:bodyPr/>
@@ -5524,7 +5524,7 @@
                         <a:buNone/>
                       </a:pPr>
                       <a:r>
-                        <a:rPr lang="en-US" sz="1050" b="1" dirty="0">
+                        <a:rPr lang="en-US" sz="950" b="1" dirty="0">
                           <a:solidFill>
                             <a:srgbClr val="22314A"/>
                           </a:solidFill>
@@ -5532,16 +5532,16 @@
                           <a:ea typeface="Calibri" pitchFamily="34" charset="-122"/>
                           <a:cs typeface="Calibri" pitchFamily="34" charset="-120"/>
                         </a:rPr>
-                        <a:t>Acero, cemento, construcción</a:t>
+                        <a:t>Acero, cemento, tableros, mat. eléctricos (Res. 236/2024)</a:t>
                       </a:r>
-                      <a:endParaRPr lang="en-US" sz="1050" dirty="0">
+                      <a:endParaRPr lang="en-US" sz="950" dirty="0">
                         <a:latin typeface="Calibri" charset="0"/>
                         <a:ea typeface="Calibri" charset="0"/>
                         <a:cs typeface="Calibri" charset="0"/>
                       </a:endParaRPr>
                     </a:p>
                   </a:txBody>
-                  <a:tcPr marL="54864" marR="54864" marT="54864" marB="54864" anchor="ctr">
+                  <a:tcPr marL="45720" marR="45720" marT="45720" marB="45720" anchor="ctr">
                     <a:lnL w="9525" cap="flat" cmpd="sng" algn="ctr">
                       <a:solidFill>
                         <a:srgbClr val="D5DEE9"/>
@@ -5592,7 +5592,7 @@
                         <a:buNone/>
                       </a:pPr>
                       <a:r>
-                        <a:rPr lang="en-US" sz="1050" b="1" dirty="0">
+                        <a:rPr lang="en-US" sz="950" b="1" dirty="0">
                           <a:solidFill>
                             <a:srgbClr val="2A7F6F"/>
                           </a:solidFill>
@@ -5602,14 +5602,14 @@
                         </a:rPr>
                         <a:t>Códigos locales + INTI-CIRSOC</a:t>
                       </a:r>
-                      <a:endParaRPr lang="en-US" sz="1050" dirty="0">
+                      <a:endParaRPr lang="en-US" sz="950" dirty="0">
                         <a:latin typeface="Calibri" charset="0"/>
                         <a:ea typeface="Calibri" charset="0"/>
                         <a:cs typeface="Calibri" charset="0"/>
                       </a:endParaRPr>
                     </a:p>
                   </a:txBody>
-                  <a:tcPr marL="54864" marR="54864" marT="54864" marB="54864" anchor="ctr">
+                  <a:tcPr marL="45720" marR="45720" marT="45720" marB="45720" anchor="ctr">
                     <a:lnL w="9525" cap="flat" cmpd="sng" algn="ctr">
                       <a:solidFill>
                         <a:srgbClr val="D5DEE9"/>
@@ -5660,7 +5660,7 @@
                         <a:buNone/>
                       </a:pPr>
                       <a:r>
-                        <a:rPr lang="en-US" sz="1050" dirty="0">
+                        <a:rPr lang="en-US" sz="950" dirty="0">
                           <a:solidFill>
                             <a:srgbClr val="22314A"/>
                           </a:solidFill>
@@ -5668,16 +5668,222 @@
                           <a:ea typeface="Calibri" pitchFamily="34" charset="-122"/>
                           <a:cs typeface="Calibri" pitchFamily="34" charset="-120"/>
                         </a:rPr>
-                        <a:t>La seguridad estructural se fiscaliza en obra (jurisdicción local); los reglamentos CIRSOC ya son la referencia técnica nacional.</a:t>
+                        <a:t>La seguridad estructural se fiscaliza en obra; los CIRSOC son obligatorios en obra pública. Se mantiene ensayo de tercera parte para desempeño al fuego.</a:t>
                       </a:r>
-                      <a:endParaRPr lang="en-US" sz="1050" dirty="0">
+                      <a:endParaRPr lang="en-US" sz="950" dirty="0">
                         <a:latin typeface="Calibri" charset="0"/>
                         <a:ea typeface="Calibri" charset="0"/>
                         <a:cs typeface="Calibri" charset="0"/>
                       </a:endParaRPr>
                     </a:p>
                   </a:txBody>
-                  <a:tcPr marL="54864" marR="54864" marT="54864" marB="54864" anchor="ctr">
+                  <a:tcPr marL="45720" marR="45720" marT="45720" marB="45720" anchor="ctr">
+                    <a:lnL w="9525" cap="flat" cmpd="sng" algn="ctr">
+                      <a:solidFill>
+                        <a:srgbClr val="D5DEE9"/>
+                      </a:solidFill>
+                      <a:prstDash val="solid"/>
+                      <a:round/>
+                      <a:headEnd type="none" w="med" len="med"/>
+                      <a:tailEnd type="none" w="med" len="med"/>
+                    </a:lnL>
+                    <a:lnR w="9525" cap="flat" cmpd="sng" algn="ctr">
+                      <a:solidFill>
+                        <a:srgbClr val="D5DEE9"/>
+                      </a:solidFill>
+                      <a:prstDash val="solid"/>
+                      <a:round/>
+                      <a:headEnd type="none" w="med" len="med"/>
+                      <a:tailEnd type="none" w="med" len="med"/>
+                    </a:lnR>
+                    <a:lnT w="9525" cap="flat" cmpd="sng" algn="ctr">
+                      <a:solidFill>
+                        <a:srgbClr val="D5DEE9"/>
+                      </a:solidFill>
+                      <a:prstDash val="solid"/>
+                      <a:round/>
+                      <a:headEnd type="none" w="med" len="med"/>
+                      <a:tailEnd type="none" w="med" len="med"/>
+                    </a:lnT>
+                    <a:lnB w="9525" cap="flat" cmpd="sng" algn="ctr">
+                      <a:solidFill>
+                        <a:srgbClr val="D5DEE9"/>
+                      </a:solidFill>
+                      <a:prstDash val="solid"/>
+                      <a:round/>
+                      <a:headEnd type="none" w="med" len="med"/>
+                      <a:tailEnd type="none" w="med" len="med"/>
+                    </a:lnB>
+                    <a:solidFill>
+                      <a:srgbClr val="FFFFFF"/>
+                    </a:solidFill>
+                  </a:tcPr>
+                </a:tc>
+              </a:tr>
+              <a:tr h="512064">
+                <a:tc>
+                  <a:txBody>
+                    <a:bodyPr/>
+                    <a:lstStyle/>
+                    <a:p>
+                      <a:pPr indent="0" marL="0">
+                        <a:buNone/>
+                      </a:pPr>
+                      <a:r>
+                        <a:rPr lang="en-US" sz="950" b="1" dirty="0">
+                          <a:solidFill>
+                            <a:srgbClr val="22314A"/>
+                          </a:solidFill>
+                          <a:latin typeface="Calibri" pitchFamily="34" charset="0"/>
+                          <a:ea typeface="Calibri" pitchFamily="34" charset="-122"/>
+                          <a:cs typeface="Calibri" pitchFamily="34" charset="-120"/>
+                        </a:rPr>
+                        <a:t>Pilas y baterías primarias</a:t>
+                      </a:r>
+                      <a:endParaRPr lang="en-US" sz="950" dirty="0">
+                        <a:latin typeface="Calibri" charset="0"/>
+                        <a:ea typeface="Calibri" charset="0"/>
+                        <a:cs typeface="Calibri" charset="0"/>
+                      </a:endParaRPr>
+                    </a:p>
+                  </a:txBody>
+                  <a:tcPr marL="45720" marR="45720" marT="45720" marB="45720" anchor="ctr">
+                    <a:lnL w="9525" cap="flat" cmpd="sng" algn="ctr">
+                      <a:solidFill>
+                        <a:srgbClr val="D5DEE9"/>
+                      </a:solidFill>
+                      <a:prstDash val="solid"/>
+                      <a:round/>
+                      <a:headEnd type="none" w="med" len="med"/>
+                      <a:tailEnd type="none" w="med" len="med"/>
+                    </a:lnL>
+                    <a:lnR w="9525" cap="flat" cmpd="sng" algn="ctr">
+                      <a:solidFill>
+                        <a:srgbClr val="D5DEE9"/>
+                      </a:solidFill>
+                      <a:prstDash val="solid"/>
+                      <a:round/>
+                      <a:headEnd type="none" w="med" len="med"/>
+                      <a:tailEnd type="none" w="med" len="med"/>
+                    </a:lnR>
+                    <a:lnT w="9525" cap="flat" cmpd="sng" algn="ctr">
+                      <a:solidFill>
+                        <a:srgbClr val="D5DEE9"/>
+                      </a:solidFill>
+                      <a:prstDash val="solid"/>
+                      <a:round/>
+                      <a:headEnd type="none" w="med" len="med"/>
+                      <a:tailEnd type="none" w="med" len="med"/>
+                    </a:lnT>
+                    <a:lnB w="9525" cap="flat" cmpd="sng" algn="ctr">
+                      <a:solidFill>
+                        <a:srgbClr val="D5DEE9"/>
+                      </a:solidFill>
+                      <a:prstDash val="solid"/>
+                      <a:round/>
+                      <a:headEnd type="none" w="med" len="med"/>
+                      <a:tailEnd type="none" w="med" len="med"/>
+                    </a:lnB>
+                    <a:solidFill>
+                      <a:srgbClr val="FFFFFF"/>
+                    </a:solidFill>
+                  </a:tcPr>
+                </a:tc>
+                <a:tc>
+                  <a:txBody>
+                    <a:bodyPr/>
+                    <a:lstStyle/>
+                    <a:p>
+                      <a:pPr indent="0" marL="0">
+                        <a:buNone/>
+                      </a:pPr>
+                      <a:r>
+                        <a:rPr lang="en-US" sz="950" b="1" dirty="0">
+                          <a:solidFill>
+                            <a:srgbClr val="2A7F6F"/>
+                          </a:solidFill>
+                          <a:latin typeface="Calibri" pitchFamily="34" charset="0"/>
+                          <a:ea typeface="Calibri" pitchFamily="34" charset="-122"/>
+                          <a:cs typeface="Calibri" pitchFamily="34" charset="-120"/>
+                        </a:rPr>
+                        <a:t>Autoridad ambiental (Sec. de Turismo, Ambiente y Deportes)</a:t>
+                      </a:r>
+                      <a:endParaRPr lang="en-US" sz="950" dirty="0">
+                        <a:latin typeface="Calibri" charset="0"/>
+                        <a:ea typeface="Calibri" charset="0"/>
+                        <a:cs typeface="Calibri" charset="0"/>
+                      </a:endParaRPr>
+                    </a:p>
+                  </a:txBody>
+                  <a:tcPr marL="45720" marR="45720" marT="45720" marB="45720" anchor="ctr">
+                    <a:lnL w="9525" cap="flat" cmpd="sng" algn="ctr">
+                      <a:solidFill>
+                        <a:srgbClr val="D5DEE9"/>
+                      </a:solidFill>
+                      <a:prstDash val="solid"/>
+                      <a:round/>
+                      <a:headEnd type="none" w="med" len="med"/>
+                      <a:tailEnd type="none" w="med" len="med"/>
+                    </a:lnL>
+                    <a:lnR w="9525" cap="flat" cmpd="sng" algn="ctr">
+                      <a:solidFill>
+                        <a:srgbClr val="D5DEE9"/>
+                      </a:solidFill>
+                      <a:prstDash val="solid"/>
+                      <a:round/>
+                      <a:headEnd type="none" w="med" len="med"/>
+                      <a:tailEnd type="none" w="med" len="med"/>
+                    </a:lnR>
+                    <a:lnT w="9525" cap="flat" cmpd="sng" algn="ctr">
+                      <a:solidFill>
+                        <a:srgbClr val="D5DEE9"/>
+                      </a:solidFill>
+                      <a:prstDash val="solid"/>
+                      <a:round/>
+                      <a:headEnd type="none" w="med" len="med"/>
+                      <a:tailEnd type="none" w="med" len="med"/>
+                    </a:lnT>
+                    <a:lnB w="9525" cap="flat" cmpd="sng" algn="ctr">
+                      <a:solidFill>
+                        <a:srgbClr val="D5DEE9"/>
+                      </a:solidFill>
+                      <a:prstDash val="solid"/>
+                      <a:round/>
+                      <a:headEnd type="none" w="med" len="med"/>
+                      <a:tailEnd type="none" w="med" len="med"/>
+                    </a:lnB>
+                    <a:solidFill>
+                      <a:srgbClr val="FFFFFF"/>
+                    </a:solidFill>
+                  </a:tcPr>
+                </a:tc>
+                <a:tc>
+                  <a:txBody>
+                    <a:bodyPr/>
+                    <a:lstStyle/>
+                    <a:p>
+                      <a:pPr indent="0" marL="0">
+                        <a:buNone/>
+                      </a:pPr>
+                      <a:r>
+                        <a:rPr lang="en-US" sz="950" dirty="0">
+                          <a:solidFill>
+                            <a:srgbClr val="22314A"/>
+                          </a:solidFill>
+                          <a:latin typeface="Calibri" pitchFamily="34" charset="0"/>
+                          <a:ea typeface="Calibri" pitchFamily="34" charset="-122"/>
+                          <a:cs typeface="Calibri" pitchFamily="34" charset="-120"/>
+                        </a:rPr>
+                        <a:t>El Dec. 431/2025 ya le asignó los parámetros ambientales de la Ley 26.184; en Comercio solo quedó la pata técnico-comercial, que se elimina.</a:t>
+                      </a:r>
+                      <a:endParaRPr lang="en-US" sz="950" dirty="0">
+                        <a:latin typeface="Calibri" charset="0"/>
+                        <a:ea typeface="Calibri" charset="0"/>
+                        <a:cs typeface="Calibri" charset="0"/>
+                      </a:endParaRPr>
+                    </a:p>
+                  </a:txBody>
+                  <a:tcPr marL="45720" marR="45720" marT="45720" marB="45720" anchor="ctr">
                     <a:lnL w="9525" cap="flat" cmpd="sng" algn="ctr">
                       <a:solidFill>
                         <a:srgbClr val="D5DEE9"/>
@@ -5757,7 +5963,7 @@
                 <a:ea typeface="Calibri" pitchFamily="34" charset="-122"/>
                 <a:cs typeface="Calibri" pitchFamily="34" charset="-120"/>
               </a:rPr>
-              <a:t>Toda base de competencia citada fue verificada contra InfoLeg/Boletín Oficial. Condición transversal: ninguna transferencia sin acta de capacidad (partida, dotación inspectiva, métricas públicas).</a:t>
+              <a:t>Verificado contra Boletín Oficial/InfoLeg, incluidas denominaciones vigentes a septiembre de 2026. Condición transversal: ninguna transferencia sin acta de capacidad (partida, dotación inspectiva, métricas públicas).</a:t>
             </a:r>
             <a:endParaRPr lang="en-US" sz="850" dirty="0"/>
           </a:p>
@@ -5867,7 +6073,7 @@
                 <a:ea typeface="Cambria" pitchFamily="34" charset="-122"/>
                 <a:cs typeface="Cambria" pitchFamily="34" charset="-120"/>
               </a:rPr>
-              <a:t>Familias sin receptor sectorial → derogar la certificación previa</a:t>
+              <a:t>Sin receptor sectorial → consolidar la vigilancia de mercado</a:t>
             </a:r>
             <a:endParaRPr lang="en-US" sz="3000" dirty="0"/>
           </a:p>
@@ -5888,7 +6094,7 @@
           </p:nvPr>
         </p:nvGraphicFramePr>
         <p:xfrm>
-          <a:off x="548640" y="1645920"/>
+          <a:off x="548640" y="1627632"/>
           <a:ext cx="11091672" cy="914400"/>
         </p:xfrm>
         <a:graphic>
@@ -5896,10 +6102,10 @@
             <a:tbl>
               <a:tblPr/>
               <a:tblGrid>
-                <a:gridCol w="3291840"/>
-                <a:gridCol w="7799832"/>
+                <a:gridCol w="3017520"/>
+                <a:gridCol w="8074152"/>
               </a:tblGrid>
-              <a:tr h="658368">
+              <a:tr h="585216">
                 <a:tc>
                   <a:txBody>
                     <a:bodyPr/>
@@ -5909,7 +6115,7 @@
                         <a:buNone/>
                       </a:pPr>
                       <a:r>
-                        <a:rPr lang="en-US" sz="1100" b="1" dirty="0">
+                        <a:rPr lang="en-US" sz="1000" b="1" dirty="0">
                           <a:solidFill>
                             <a:srgbClr val="FFFFFF"/>
                           </a:solidFill>
@@ -5919,14 +6125,14 @@
                         </a:rPr>
                         <a:t>Familia</a:t>
                       </a:r>
-                      <a:endParaRPr lang="en-US" sz="1100" dirty="0">
+                      <a:endParaRPr lang="en-US" sz="1000" dirty="0">
                         <a:latin typeface="Calibri" charset="0"/>
                         <a:ea typeface="Calibri" charset="0"/>
                         <a:cs typeface="Calibri" charset="0"/>
                       </a:endParaRPr>
                     </a:p>
                   </a:txBody>
-                  <a:tcPr marL="54864" marR="54864" marT="54864" marB="54864" anchor="ctr">
+                  <a:tcPr marL="45720" marR="45720" marT="45720" marB="45720" anchor="ctr">
                     <a:lnL w="9525" cap="flat" cmpd="sng" algn="ctr">
                       <a:solidFill>
                         <a:srgbClr val="E5D5D5"/>
@@ -5977,7 +6183,7 @@
                         <a:buNone/>
                       </a:pPr>
                       <a:r>
-                        <a:rPr lang="en-US" sz="1100" b="1" dirty="0">
+                        <a:rPr lang="en-US" sz="1000" b="1" dirty="0">
                           <a:solidFill>
                             <a:srgbClr val="FFFFFF"/>
                           </a:solidFill>
@@ -5985,16 +6191,16 @@
                           <a:ea typeface="Calibri" pitchFamily="34" charset="-122"/>
                           <a:cs typeface="Calibri" pitchFamily="34" charset="-120"/>
                         </a:rPr>
-                        <a:t>Tratamiento</a:t>
+                        <a:t>Régimen vigente y propuesta</a:t>
                       </a:r>
-                      <a:endParaRPr lang="en-US" sz="1100" dirty="0">
+                      <a:endParaRPr lang="en-US" sz="1000" dirty="0">
                         <a:latin typeface="Calibri" charset="0"/>
                         <a:ea typeface="Calibri" charset="0"/>
                         <a:cs typeface="Calibri" charset="0"/>
                       </a:endParaRPr>
                     </a:p>
                   </a:txBody>
-                  <a:tcPr marL="54864" marR="54864" marT="54864" marB="54864" anchor="ctr">
+                  <a:tcPr marL="45720" marR="45720" marT="45720" marB="45720" anchor="ctr">
                     <a:lnL w="9525" cap="flat" cmpd="sng" algn="ctr">
                       <a:solidFill>
                         <a:srgbClr val="E5D5D5"/>
@@ -6037,7 +6243,7 @@
                   </a:tcPr>
                 </a:tc>
               </a:tr>
-              <a:tr h="658368">
+              <a:tr h="585216">
                 <a:tc>
                   <a:txBody>
                     <a:bodyPr/>
@@ -6047,7 +6253,7 @@
                         <a:buNone/>
                       </a:pPr>
                       <a:r>
-                        <a:rPr lang="en-US" sz="1100" b="1" dirty="0">
+                        <a:rPr lang="en-US" sz="1000" b="1" dirty="0">
                           <a:solidFill>
                             <a:srgbClr val="14213D"/>
                           </a:solidFill>
@@ -6055,16 +6261,16 @@
                           <a:ea typeface="Calibri" pitchFamily="34" charset="-122"/>
                           <a:cs typeface="Calibri" pitchFamily="34" charset="-120"/>
                         </a:rPr>
-                        <a:t>Seguridad eléctrica de baja tensión</a:t>
+                        <a:t>Seguridad eléctrica y máquinas eléctricas</a:t>
                       </a:r>
-                      <a:endParaRPr lang="en-US" sz="1100" dirty="0">
+                      <a:endParaRPr lang="en-US" sz="1000" dirty="0">
                         <a:latin typeface="Calibri" charset="0"/>
                         <a:ea typeface="Calibri" charset="0"/>
                         <a:cs typeface="Calibri" charset="0"/>
                       </a:endParaRPr>
                     </a:p>
                   </a:txBody>
-                  <a:tcPr marL="54864" marR="54864" marT="54864" marB="54864" anchor="ctr">
+                  <a:tcPr marL="45720" marR="45720" marT="45720" marB="45720" anchor="ctr">
                     <a:lnL w="9525" cap="flat" cmpd="sng" algn="ctr">
                       <a:solidFill>
                         <a:srgbClr val="E5D5D5"/>
@@ -6115,7 +6321,7 @@
                         <a:buNone/>
                       </a:pPr>
                       <a:r>
-                        <a:rPr lang="en-US" sz="1100" dirty="0">
+                        <a:rPr lang="en-US" sz="1000" dirty="0">
                           <a:solidFill>
                             <a:srgbClr val="22314A"/>
                           </a:solidFill>
@@ -6123,16 +6329,16 @@
                           <a:ea typeface="Calibri" pitchFamily="34" charset="-122"/>
                           <a:cs typeface="Calibri" pitchFamily="34" charset="-120"/>
                         </a:rPr>
-                        <a:t>DJC del fabricante + reconocimiento internacional (ya vigente: Res. 16/2025 y Dec. 892/2025) + vigilancia de Lealtad Comercial. Se mantiene la trazabilidad QR.</a:t>
+                        <a:t>Hoy: DJC respaldada en certificación de tercera parte OBLIGATORIA (Res. 16 y 17/2025) con reconocimiento internacional (Dec. 892/2025). Propuesta: derogar esa certificación remanente → DJC + vigilancia; se mantiene el QR. La única fila donde la derogación está pendiente.</a:t>
                       </a:r>
-                      <a:endParaRPr lang="en-US" sz="1100" dirty="0">
+                      <a:endParaRPr lang="en-US" sz="1000" dirty="0">
                         <a:latin typeface="Calibri" charset="0"/>
                         <a:ea typeface="Calibri" charset="0"/>
                         <a:cs typeface="Calibri" charset="0"/>
                       </a:endParaRPr>
                     </a:p>
                   </a:txBody>
-                  <a:tcPr marL="54864" marR="54864" marT="54864" marB="54864" anchor="ctr">
+                  <a:tcPr marL="45720" marR="45720" marT="45720" marB="45720" anchor="ctr">
                     <a:lnL w="9525" cap="flat" cmpd="sng" algn="ctr">
                       <a:solidFill>
                         <a:srgbClr val="E5D5D5"/>
@@ -6175,7 +6381,7 @@
                   </a:tcPr>
                 </a:tc>
               </a:tr>
-              <a:tr h="658368">
+              <a:tr h="585216">
                 <a:tc>
                   <a:txBody>
                     <a:bodyPr/>
@@ -6185,7 +6391,7 @@
                         <a:buNone/>
                       </a:pPr>
                       <a:r>
-                        <a:rPr lang="en-US" sz="1100" b="1" dirty="0">
+                        <a:rPr lang="en-US" sz="1000" b="1" dirty="0">
                           <a:solidFill>
                             <a:srgbClr val="14213D"/>
                           </a:solidFill>
@@ -6195,14 +6401,14 @@
                         </a:rPr>
                         <a:t>Juguetes</a:t>
                       </a:r>
-                      <a:endParaRPr lang="en-US" sz="1100" dirty="0">
+                      <a:endParaRPr lang="en-US" sz="1000" dirty="0">
                         <a:latin typeface="Calibri" charset="0"/>
                         <a:ea typeface="Calibri" charset="0"/>
                         <a:cs typeface="Calibri" charset="0"/>
                       </a:endParaRPr>
                     </a:p>
                   </a:txBody>
-                  <a:tcPr marL="54864" marR="54864" marT="54864" marB="54864" anchor="ctr">
+                  <a:tcPr marL="45720" marR="45720" marT="45720" marB="45720" anchor="ctr">
                     <a:lnL w="9525" cap="flat" cmpd="sng" algn="ctr">
                       <a:solidFill>
                         <a:srgbClr val="E5D5D5"/>
@@ -6253,7 +6459,7 @@
                         <a:buNone/>
                       </a:pPr>
                       <a:r>
-                        <a:rPr lang="en-US" sz="1100" dirty="0">
+                        <a:rPr lang="en-US" sz="1000" dirty="0">
                           <a:solidFill>
                             <a:srgbClr val="22314A"/>
                           </a:solidFill>
@@ -6261,16 +6467,16 @@
                           <a:ea typeface="Calibri" pitchFamily="34" charset="-122"/>
                           <a:cs typeface="Calibri" pitchFamily="34" charset="-120"/>
                         </a:rPr>
-                        <a:t>DJC + vigilancia. Condición dura: ensayo de tercera parte obligatorio para productos infantiles — EE.UU. lo votó 407-0 (CPSIA) tras los recalls de 2007; el “modelo americano” no es “sin ensayo”.</a:t>
+                        <a:t>Ya reconvertidos (Res. 313/2025): DJC + ensayo de tercera parte obligatorio. Se mantiene el ensayo infantil (CPSIA: 407-0 en la votación inicial). Es RTM (GMC 23/04, art. 1 de la Res. 163/2005 vigente): sus requisitos no se derogan unilateralmente.</a:t>
                       </a:r>
-                      <a:endParaRPr lang="en-US" sz="1100" dirty="0">
+                      <a:endParaRPr lang="en-US" sz="1000" dirty="0">
                         <a:latin typeface="Calibri" charset="0"/>
                         <a:ea typeface="Calibri" charset="0"/>
                         <a:cs typeface="Calibri" charset="0"/>
                       </a:endParaRPr>
                     </a:p>
                   </a:txBody>
-                  <a:tcPr marL="54864" marR="54864" marT="54864" marB="54864" anchor="ctr">
+                  <a:tcPr marL="45720" marR="45720" marT="45720" marB="45720" anchor="ctr">
                     <a:lnL w="9525" cap="flat" cmpd="sng" algn="ctr">
                       <a:solidFill>
                         <a:srgbClr val="E5D5D5"/>
@@ -6313,7 +6519,7 @@
                   </a:tcPr>
                 </a:tc>
               </a:tr>
-              <a:tr h="658368">
+              <a:tr h="585216">
                 <a:tc>
                   <a:txBody>
                     <a:bodyPr/>
@@ -6323,7 +6529,7 @@
                         <a:buNone/>
                       </a:pPr>
                       <a:r>
-                        <a:rPr lang="en-US" sz="1100" b="1" dirty="0">
+                        <a:rPr lang="en-US" sz="1000" b="1" dirty="0">
                           <a:solidFill>
                             <a:srgbClr val="14213D"/>
                           </a:solidFill>
@@ -6331,16 +6537,16 @@
                           <a:ea typeface="Calibri" pitchFamily="34" charset="-122"/>
                           <a:cs typeface="Calibri" pitchFamily="34" charset="-120"/>
                         </a:rPr>
-                        <a:t>Bicicletas infantiles, encendedores, anteojos, tableros</a:t>
+                        <a:t>Encendedores y anteojos de sol</a:t>
                       </a:r>
-                      <a:endParaRPr lang="en-US" sz="1100" dirty="0">
+                      <a:endParaRPr lang="en-US" sz="1000" dirty="0">
                         <a:latin typeface="Calibri" charset="0"/>
                         <a:ea typeface="Calibri" charset="0"/>
                         <a:cs typeface="Calibri" charset="0"/>
                       </a:endParaRPr>
                     </a:p>
                   </a:txBody>
-                  <a:tcPr marL="54864" marR="54864" marT="54864" marB="54864" anchor="ctr">
+                  <a:tcPr marL="45720" marR="45720" marT="45720" marB="45720" anchor="ctr">
                     <a:lnL w="9525" cap="flat" cmpd="sng" algn="ctr">
                       <a:solidFill>
                         <a:srgbClr val="E5D5D5"/>
@@ -6391,7 +6597,7 @@
                         <a:buNone/>
                       </a:pPr>
                       <a:r>
-                        <a:rPr lang="en-US" sz="1100" dirty="0">
+                        <a:rPr lang="en-US" sz="1000" dirty="0">
                           <a:solidFill>
                             <a:srgbClr val="22314A"/>
                           </a:solidFill>
@@ -6399,16 +6605,16 @@
                           <a:ea typeface="Calibri" pitchFamily="34" charset="-122"/>
                           <a:cs typeface="Calibri" pitchFamily="34" charset="-120"/>
                         </a:rPr>
-                        <a:t>Rotulado + vigilancia (la Res. 313/2025 ya fue en esa dirección).</a:t>
+                        <a:t>Ya reconvertidos (Res. 313/2025): DJC + ensayo (uso infantil / filtrado UV). Origen puramente nacional: derogables si el costo-beneficio da negativo.</a:t>
                       </a:r>
-                      <a:endParaRPr lang="en-US" sz="1100" dirty="0">
+                      <a:endParaRPr lang="en-US" sz="1000" dirty="0">
                         <a:latin typeface="Calibri" charset="0"/>
                         <a:ea typeface="Calibri" charset="0"/>
                         <a:cs typeface="Calibri" charset="0"/>
                       </a:endParaRPr>
                     </a:p>
                   </a:txBody>
-                  <a:tcPr marL="54864" marR="54864" marT="54864" marB="54864" anchor="ctr">
+                  <a:tcPr marL="45720" marR="45720" marT="45720" marB="45720" anchor="ctr">
                     <a:lnL w="9525" cap="flat" cmpd="sng" algn="ctr">
                       <a:solidFill>
                         <a:srgbClr val="E5D5D5"/>
@@ -6451,7 +6657,7 @@
                   </a:tcPr>
                 </a:tc>
               </a:tr>
-              <a:tr h="658368">
+              <a:tr h="585216">
                 <a:tc>
                   <a:txBody>
                     <a:bodyPr/>
@@ -6461,7 +6667,7 @@
                         <a:buNone/>
                       </a:pPr>
                       <a:r>
-                        <a:rPr lang="en-US" sz="1100" b="1" dirty="0">
+                        <a:rPr lang="en-US" sz="1000" b="1" dirty="0">
                           <a:solidFill>
                             <a:srgbClr val="14213D"/>
                           </a:solidFill>
@@ -6469,16 +6675,16 @@
                           <a:ea typeface="Calibri" pitchFamily="34" charset="-122"/>
                           <a:cs typeface="Calibri" pitchFamily="34" charset="-120"/>
                         </a:rPr>
-                        <a:t>Etiquetado de textiles y calzado</a:t>
+                        <a:t>Bicicletas infantiles y tableros</a:t>
                       </a:r>
-                      <a:endParaRPr lang="en-US" sz="1100" dirty="0">
+                      <a:endParaRPr lang="en-US" sz="1000" dirty="0">
                         <a:latin typeface="Calibri" charset="0"/>
                         <a:ea typeface="Calibri" charset="0"/>
                         <a:cs typeface="Calibri" charset="0"/>
                       </a:endParaRPr>
                     </a:p>
                   </a:txBody>
-                  <a:tcPr marL="54864" marR="54864" marT="54864" marB="54864" anchor="ctr">
+                  <a:tcPr marL="45720" marR="45720" marT="45720" marB="45720" anchor="ctr">
                     <a:lnL w="9525" cap="flat" cmpd="sng" algn="ctr">
                       <a:solidFill>
                         <a:srgbClr val="E5D5D5"/>
@@ -6529,7 +6735,7 @@
                         <a:buNone/>
                       </a:pPr>
                       <a:r>
-                        <a:rPr lang="en-US" sz="1100" dirty="0">
+                        <a:rPr lang="en-US" sz="1000" dirty="0">
                           <a:solidFill>
                             <a:srgbClr val="22314A"/>
                           </a:solidFill>
@@ -6537,16 +6743,16 @@
                           <a:ea typeface="Calibri" pitchFamily="34" charset="-122"/>
                           <a:cs typeface="Calibri" pitchFamily="34" charset="-120"/>
                         </a:rPr>
-                        <a:t>Información pura al consumidor: se absorbe en el régimen general de lealtad comercial (información engañosa, Dec. 274/2019).</a:t>
+                        <a:t>Ya reconvertidos: solo rotulado. Bicicletas es RTM (GMC 45/03, norma NM 301): se preserva o renegocia. Tableros: nacional.</a:t>
                       </a:r>
-                      <a:endParaRPr lang="en-US" sz="1100" dirty="0">
+                      <a:endParaRPr lang="en-US" sz="1000" dirty="0">
                         <a:latin typeface="Calibri" charset="0"/>
                         <a:ea typeface="Calibri" charset="0"/>
                         <a:cs typeface="Calibri" charset="0"/>
                       </a:endParaRPr>
                     </a:p>
                   </a:txBody>
-                  <a:tcPr marL="54864" marR="54864" marT="54864" marB="54864" anchor="ctr">
+                  <a:tcPr marL="45720" marR="45720" marT="45720" marB="45720" anchor="ctr">
                     <a:lnL w="9525" cap="flat" cmpd="sng" algn="ctr">
                       <a:solidFill>
                         <a:srgbClr val="E5D5D5"/>
@@ -6589,7 +6795,7 @@
                   </a:tcPr>
                 </a:tc>
               </a:tr>
-              <a:tr h="658368">
+              <a:tr h="585216">
                 <a:tc>
                   <a:txBody>
                     <a:bodyPr/>
@@ -6599,7 +6805,7 @@
                         <a:buNone/>
                       </a:pPr>
                       <a:r>
-                        <a:rPr lang="en-US" sz="1100" b="1" dirty="0">
+                        <a:rPr lang="en-US" sz="1000" b="1" dirty="0">
                           <a:solidFill>
                             <a:srgbClr val="14213D"/>
                           </a:solidFill>
@@ -6607,16 +6813,16 @@
                           <a:ea typeface="Calibri" pitchFamily="34" charset="-122"/>
                           <a:cs typeface="Calibri" pitchFamily="34" charset="-120"/>
                         </a:rPr>
-                        <a:t>Industriales intermedios (cables, equipos a presión, válvulas)</a:t>
+                        <a:t>Etiquetado de textiles y calzado</a:t>
                       </a:r>
-                      <a:endParaRPr lang="en-US" sz="1100" dirty="0">
+                      <a:endParaRPr lang="en-US" sz="1000" dirty="0">
                         <a:latin typeface="Calibri" charset="0"/>
                         <a:ea typeface="Calibri" charset="0"/>
                         <a:cs typeface="Calibri" charset="0"/>
                       </a:endParaRPr>
                     </a:p>
                   </a:txBody>
-                  <a:tcPr marL="54864" marR="54864" marT="54864" marB="54864" anchor="ctr">
+                  <a:tcPr marL="45720" marR="45720" marT="45720" marB="45720" anchor="ctr">
                     <a:lnL w="9525" cap="flat" cmpd="sng" algn="ctr">
                       <a:solidFill>
                         <a:srgbClr val="E5D5D5"/>
@@ -6667,7 +6873,7 @@
                         <a:buNone/>
                       </a:pPr>
                       <a:r>
-                        <a:rPr lang="en-US" sz="1100" dirty="0">
+                        <a:rPr lang="en-US" sz="1000" dirty="0">
                           <a:solidFill>
                             <a:srgbClr val="22314A"/>
                           </a:solidFill>
@@ -6675,16 +6881,154 @@
                           <a:ea typeface="Calibri" pitchFamily="34" charset="-122"/>
                           <a:cs typeface="Calibri" pitchFamily="34" charset="-120"/>
                         </a:rPr>
-                        <a:t>Ya derogados (Res. 26/2025): el precedente de derogación por costo-beneficio negativo.</a:t>
+                        <a:t>Información al consumidor → régimen general de información engañosa (Dec. 274/2019, arts. 5-6). Textil es RTM (GMC 62/18): se muda o renegocia. Calzado: nacional → derogable.</a:t>
                       </a:r>
-                      <a:endParaRPr lang="en-US" sz="1100" dirty="0">
+                      <a:endParaRPr lang="en-US" sz="1000" dirty="0">
                         <a:latin typeface="Calibri" charset="0"/>
                         <a:ea typeface="Calibri" charset="0"/>
                         <a:cs typeface="Calibri" charset="0"/>
                       </a:endParaRPr>
                     </a:p>
                   </a:txBody>
-                  <a:tcPr marL="54864" marR="54864" marT="54864" marB="54864" anchor="ctr">
+                  <a:tcPr marL="45720" marR="45720" marT="45720" marB="45720" anchor="ctr">
+                    <a:lnL w="9525" cap="flat" cmpd="sng" algn="ctr">
+                      <a:solidFill>
+                        <a:srgbClr val="E5D5D5"/>
+                      </a:solidFill>
+                      <a:prstDash val="solid"/>
+                      <a:round/>
+                      <a:headEnd type="none" w="med" len="med"/>
+                      <a:tailEnd type="none" w="med" len="med"/>
+                    </a:lnL>
+                    <a:lnR w="9525" cap="flat" cmpd="sng" algn="ctr">
+                      <a:solidFill>
+                        <a:srgbClr val="E5D5D5"/>
+                      </a:solidFill>
+                      <a:prstDash val="solid"/>
+                      <a:round/>
+                      <a:headEnd type="none" w="med" len="med"/>
+                      <a:tailEnd type="none" w="med" len="med"/>
+                    </a:lnR>
+                    <a:lnT w="9525" cap="flat" cmpd="sng" algn="ctr">
+                      <a:solidFill>
+                        <a:srgbClr val="E5D5D5"/>
+                      </a:solidFill>
+                      <a:prstDash val="solid"/>
+                      <a:round/>
+                      <a:headEnd type="none" w="med" len="med"/>
+                      <a:tailEnd type="none" w="med" len="med"/>
+                    </a:lnT>
+                    <a:lnB w="9525" cap="flat" cmpd="sng" algn="ctr">
+                      <a:solidFill>
+                        <a:srgbClr val="E5D5D5"/>
+                      </a:solidFill>
+                      <a:prstDash val="solid"/>
+                      <a:round/>
+                      <a:headEnd type="none" w="med" len="med"/>
+                      <a:tailEnd type="none" w="med" len="med"/>
+                    </a:lnB>
+                    <a:solidFill>
+                      <a:srgbClr val="FFFFFF"/>
+                    </a:solidFill>
+                  </a:tcPr>
+                </a:tc>
+              </a:tr>
+              <a:tr h="585216">
+                <a:tc>
+                  <a:txBody>
+                    <a:bodyPr/>
+                    <a:lstStyle/>
+                    <a:p>
+                      <a:pPr indent="0" marL="0">
+                        <a:buNone/>
+                      </a:pPr>
+                      <a:r>
+                        <a:rPr lang="en-US" sz="1000" b="1" dirty="0">
+                          <a:solidFill>
+                            <a:srgbClr val="14213D"/>
+                          </a:solidFill>
+                          <a:latin typeface="Calibri" pitchFamily="34" charset="0"/>
+                          <a:ea typeface="Calibri" pitchFamily="34" charset="-122"/>
+                          <a:cs typeface="Calibri" pitchFamily="34" charset="-120"/>
+                        </a:rPr>
+                        <a:t>Marcado de conformidad y marco general (Res. 237/2024)</a:t>
+                      </a:r>
+                      <a:endParaRPr lang="en-US" sz="1000" dirty="0">
+                        <a:latin typeface="Calibri" charset="0"/>
+                        <a:ea typeface="Calibri" charset="0"/>
+                        <a:cs typeface="Calibri" charset="0"/>
+                      </a:endParaRPr>
+                    </a:p>
+                  </a:txBody>
+                  <a:tcPr marL="45720" marR="45720" marT="45720" marB="45720" anchor="ctr">
+                    <a:lnL w="9525" cap="flat" cmpd="sng" algn="ctr">
+                      <a:solidFill>
+                        <a:srgbClr val="E5D5D5"/>
+                      </a:solidFill>
+                      <a:prstDash val="solid"/>
+                      <a:round/>
+                      <a:headEnd type="none" w="med" len="med"/>
+                      <a:tailEnd type="none" w="med" len="med"/>
+                    </a:lnL>
+                    <a:lnR w="9525" cap="flat" cmpd="sng" algn="ctr">
+                      <a:solidFill>
+                        <a:srgbClr val="E5D5D5"/>
+                      </a:solidFill>
+                      <a:prstDash val="solid"/>
+                      <a:round/>
+                      <a:headEnd type="none" w="med" len="med"/>
+                      <a:tailEnd type="none" w="med" len="med"/>
+                    </a:lnR>
+                    <a:lnT w="9525" cap="flat" cmpd="sng" algn="ctr">
+                      <a:solidFill>
+                        <a:srgbClr val="E5D5D5"/>
+                      </a:solidFill>
+                      <a:prstDash val="solid"/>
+                      <a:round/>
+                      <a:headEnd type="none" w="med" len="med"/>
+                      <a:tailEnd type="none" w="med" len="med"/>
+                    </a:lnT>
+                    <a:lnB w="9525" cap="flat" cmpd="sng" algn="ctr">
+                      <a:solidFill>
+                        <a:srgbClr val="E5D5D5"/>
+                      </a:solidFill>
+                      <a:prstDash val="solid"/>
+                      <a:round/>
+                      <a:headEnd type="none" w="med" len="med"/>
+                      <a:tailEnd type="none" w="med" len="med"/>
+                    </a:lnB>
+                    <a:solidFill>
+                      <a:srgbClr val="FFFFFF"/>
+                    </a:solidFill>
+                  </a:tcPr>
+                </a:tc>
+                <a:tc>
+                  <a:txBody>
+                    <a:bodyPr/>
+                    <a:lstStyle/>
+                    <a:p>
+                      <a:pPr indent="0" marL="0">
+                        <a:buNone/>
+                      </a:pPr>
+                      <a:r>
+                        <a:rPr lang="en-US" sz="1000" dirty="0">
+                          <a:solidFill>
+                            <a:srgbClr val="22314A"/>
+                          </a:solidFill>
+                          <a:latin typeface="Calibri" pitchFamily="34" charset="0"/>
+                          <a:ea typeface="Calibri" pitchFamily="34" charset="-122"/>
+                          <a:cs typeface="Calibri" pitchFamily="34" charset="-120"/>
+                        </a:rPr>
+                        <a:t>El régimen transversal del que depende toda la arquitectura DJC/QR: pasa al Protocolo de Vigilancia (Res. 56/2026) bajo la Subsecretaría de Defensa del Consumidor y Lealtad Comercial.</a:t>
+                      </a:r>
+                      <a:endParaRPr lang="en-US" sz="1000" dirty="0">
+                        <a:latin typeface="Calibri" charset="0"/>
+                        <a:ea typeface="Calibri" charset="0"/>
+                        <a:cs typeface="Calibri" charset="0"/>
+                      </a:endParaRPr>
+                    </a:p>
+                  </a:txBody>
+                  <a:tcPr marL="45720" marR="45720" marT="45720" marB="45720" anchor="ctr">
                     <a:lnL w="9525" cap="flat" cmpd="sng" algn="ctr">
                       <a:solidFill>
                         <a:srgbClr val="E5D5D5"/>
@@ -6739,7 +7083,7 @@
         </p:nvSpPr>
         <p:spPr>
           <a:xfrm>
-            <a:off x="548640" y="5623560"/>
+            <a:off x="548640" y="5806440"/>
             <a:ext cx="11091672" cy="685800"/>
           </a:xfrm>
           <a:prstGeom prst="roundRect">
@@ -6761,7 +7105,7 @@
         </p:nvSpPr>
         <p:spPr>
           <a:xfrm>
-            <a:off x="822960" y="5623560"/>
+            <a:off x="822960" y="5806440"/>
             <a:ext cx="10543032" cy="685800"/>
           </a:xfrm>
           <a:prstGeom prst="rect">
@@ -6778,7 +7122,7 @@
               <a:buNone/>
             </a:pPr>
             <a:r>
-              <a:rPr lang="en-US" sz="1200" b="1" dirty="0">
+              <a:rPr lang="en-US" sz="1100" b="1" dirty="0">
                 <a:solidFill>
                   <a:srgbClr val="E8837F"/>
                 </a:solidFill>
@@ -6792,7 +7136,7 @@
               <a:buNone/>
             </a:pPr>
             <a:r>
-              <a:rPr lang="en-US" sz="1200" dirty="0">
+              <a:rPr lang="en-US" sz="1100" dirty="0">
                 <a:solidFill>
                   <a:srgbClr val="CADCFC"/>
                 </a:solidFill>
@@ -6800,9 +7144,9 @@
                 <a:ea typeface="Calibri" pitchFamily="34" charset="-122"/>
                 <a:cs typeface="Calibri" pitchFamily="34" charset="-120"/>
               </a:rPr>
-              <a:t>los reglamentos técnicos Mercosur internalizados nunca se derogan unilateralmente (Ouro Preto, arts. 38/42) — se transfieren de organismo de aplicación o se renegocian en el SGT 3.</a:t>
-            </a:r>
-            <a:endParaRPr lang="en-US" sz="1200" dirty="0"/>
+              <a:t>los RT Mercosur internalizados nunca se derogan unilateralmente (Ouro Preto, arts. 38, 40 y 42): se muda el organismo de aplicación o se renegocia en el SGT 3. La Res. 313/2025 ya probó la técnica: derogó la certificación sin tocar los RTM.</a:t>
+            </a:r>
+            <a:endParaRPr lang="en-US" sz="1100" dirty="0"/>
           </a:p>
         </p:txBody>
       </p:sp>
@@ -10312,7 +10656,7 @@
                 <a:ea typeface="Calibri" pitchFamily="34" charset="-122"/>
                 <a:cs typeface="Calibri" pitchFamily="34" charset="-120"/>
               </a:rPr>
-              <a:t>Nómina de países del Anexo I del Dec. 892/2025 (publicada solo en la edición web del B.O.: cotejar antes de citar).</a:t>
+              <a:t>La relación de anteojos “15 M vs 2,5 M” (sin fuente: se usa la estimación sectorial de ~4 de cada 10, 5-7 M unidades/año).</a:t>
             </a:r>
             <a:endParaRPr lang="en-US" sz="1150" dirty="0"/>
           </a:p>
@@ -11239,7 +11583,7 @@
                 <a:ea typeface="Calibri" pitchFamily="34" charset="-122"/>
                 <a:cs typeface="Calibri" pitchFamily="34" charset="-120"/>
               </a:rPr>
-              <a:t>A los organismos sectoriales que entienden el riesgo y fiscalizan de verdad: ANMAT, SRT, Energía, ANSV/Transporte, INTI, ENARGAS y los códigos de edificación locales. Ninguna transferencia sin receptor con presupuesto, inspectores y métricas.</a:t>
+              <a:t>A los organismos sectoriales que entienden el riesgo y fiscalizan de verdad: Salud/SENASA, SRT, Energía, Transporte/ANSV, la autoridad ambiental, el ENRGE (ex ENARGAS) y los códigos de edificación locales. Ninguna transferencia sin receptor con presupuesto, inspectores y métricas.</a:t>
             </a:r>
             <a:endParaRPr lang="en-US" sz="1150" dirty="0"/>
           </a:p>
@@ -13892,7 +14236,7 @@
                 <a:ea typeface="Cambria" pitchFamily="34" charset="-122"/>
                 <a:cs typeface="Cambria" pitchFamily="34" charset="-120"/>
               </a:rPr>
-              <a:t>40%</a:t>
+              <a:t>30-40%</a:t>
             </a:r>
             <a:endParaRPr lang="en-US" sz="4000" dirty="0"/>
           </a:p>
@@ -14031,7 +14375,7 @@
                 <a:ea typeface="Cambria" pitchFamily="34" charset="-122"/>
                 <a:cs typeface="Cambria" pitchFamily="34" charset="-120"/>
               </a:rPr>
-              <a:t>15 M vs 2,5 M</a:t>
+              <a:t>4 de 10</a:t>
             </a:r>
             <a:endParaRPr lang="en-US" sz="2600" dirty="0"/>
           </a:p>
@@ -14070,7 +14414,7 @@
                 <a:ea typeface="Calibri" pitchFamily="34" charset="-122"/>
                 <a:cs typeface="Calibri" pitchFamily="34" charset="-120"/>
               </a:rPr>
-              <a:t>anteojos: contrabando vs mercado formal</a:t>
+              <a:t>anteojos vendidos son ilegales</a:t>
             </a:r>
             <a:endParaRPr lang="en-US" sz="1250" dirty="0"/>
           </a:p>
@@ -14109,7 +14453,7 @@
                 <a:ea typeface="Calibri" pitchFamily="34" charset="-122"/>
                 <a:cs typeface="Calibri" pitchFamily="34" charset="-120"/>
               </a:rPr>
-              <a:t>Estimación del sector óptico: por cada anteojo formal entran seis de contrabando, sin certificación ni trazabilidad.</a:t>
+              <a:t>Estimación de las cámaras del sector: 5 a 7 millones de unidades ilegales por año, sin certificación ni garantía de calidad.</a:t>
             </a:r>
             <a:endParaRPr lang="en-US" sz="1050" dirty="0"/>
           </a:p>
